--- a/fixtures/golden/hello-merged.pptx
+++ b/fixtures/golden/hello-merged.pptx
@@ -2333,6 +2333,71 @@
                                         </p:tgtEl>
                                       </p:cBhvr>
                                     </p:animEffect>
+                                  </p:childTnLst>
+                                </p:cTn>
+                              </p:par>
+                            </p:childTnLst>
+                          </p:cTn>
+                        </p:par>
+                        <p:par>
+                          <p:cTn id="8" fill="hold">
+                            <p:stCondLst>
+                              <p:cond delay="200"/>
+                            </p:stCondLst>
+                            <p:childTnLst>
+                              <p:par>
+                                <p:cTn id="9" presetID="8" presetClass="emph" presetSubtype="0" fill="hold" nodeType="clickEffect">
+                                  <p:stCondLst>
+                                    <p:cond delay="0"/>
+                                  </p:stCondLst>
+                                  <p:iterate type="lt">
+                                    <p:tmPct val="0"/>
+                                  </p:iterate>
+                                  <p:childTnLst>
+                                    <p:animRot by="21600000">
+                                      <p:cBhvr>
+                                        <p:cTn id="10" dur="1000" fill="hold"/>
+                                        <p:tgtEl>
+                                          <p:spTgt spid="5"/>
+                                        </p:tgtEl>
+                                        <p:attrNameLst>
+                                          <p:attrName>r</p:attrName>
+                                        </p:attrNameLst>
+                                      </p:cBhvr>
+                                    </p:animRot>
+                                  </p:childTnLst>
+                                </p:cTn>
+                              </p:par>
+                            </p:childTnLst>
+                          </p:cTn>
+                        </p:par>
+                        <p:par>
+                          <p:cTn id="11" fill="hold">
+                            <p:stCondLst>
+                              <p:cond delay="400"/>
+                            </p:stCondLst>
+                            <p:childTnLst>
+                              <p:par>
+                                <p:cTn id="12" presetID="63" presetClass="path" presetSubtype="0" accel="50000" decel="50000" fill="hold" nodeType="clickEffect">
+                                  <p:stCondLst>
+                                    <p:cond delay="0"/>
+                                  </p:stCondLst>
+                                  <p:iterate type="lt">
+                                    <p:tmPct val="0"/>
+                                  </p:iterate>
+                                  <p:childTnLst>
+                                    <p:animMotion origin="layout" path="M 0 0 L 0.25 0 E" pathEditMode="relative" ptsTypes="">
+                                      <p:cBhvr>
+                                        <p:cTn id="13" dur="800" fill="hold"/>
+                                        <p:tgtEl>
+                                          <p:spTgt spid="5"/>
+                                        </p:tgtEl>
+                                        <p:attrNameLst>
+                                          <p:attrName>ppt_x</p:attrName>
+                                          <p:attrName>ppt_y</p:attrName>
+                                        </p:attrNameLst>
+                                      </p:cBhvr>
+                                    </p:animMotion>
                                   </p:childTnLst>
                                 </p:cTn>
                               </p:par>
@@ -3015,6 +3080,36 @@
                             </p:childTnLst>
                           </p:cTn>
                         </p:par>
+                        <p:par>
+                          <p:cTn id="8" fill="hold">
+                            <p:stCondLst>
+                              <p:cond delay="200"/>
+                            </p:stCondLst>
+                            <p:childTnLst>
+                              <p:par>
+                                <p:cTn id="9" presetID="6" presetClass="emph" presetSubtype="0" fill="hold" nodeType="clickEffect">
+                                  <p:stCondLst>
+                                    <p:cond delay="0"/>
+                                  </p:stCondLst>
+                                  <p:iterate type="lt">
+                                    <p:tmPct val="0"/>
+                                  </p:iterate>
+                                  <p:childTnLst>
+                                    <p:animScale>
+                                      <p:cBhvr>
+                                        <p:cTn id="10" dur="900" fill="hold"/>
+                                        <p:tgtEl>
+                                          <p:spTgt spid="5"/>
+                                        </p:tgtEl>
+                                      </p:cBhvr>
+                                      <p:by x="150000" y="150000"/>
+                                    </p:animScale>
+                                  </p:childTnLst>
+                                </p:cTn>
+                              </p:par>
+                            </p:childTnLst>
+                          </p:cTn>
+                        </p:par>
                       </p:childTnLst>
                     </p:cTn>
                   </p:par>

--- a/fixtures/golden/hello-merged.pptx
+++ b/fixtures/golden/hello-merged.pptx
@@ -673,6 +673,384 @@
 </p:notesMaster>
 </file>
 
+<file path=ppt/notesMasters/notesMaster2.xml><?xml version="1.0" encoding="utf-8"?>
+<p:notesMaster xmlns:a="http://schemas.openxmlformats.org/drawingml/2006/main" xmlns:r="http://schemas.openxmlformats.org/officeDocument/2006/relationships" xmlns:p="http://schemas.openxmlformats.org/presentationml/2006/main">
+  <p:cSld>
+    <p:spTree>
+      <p:nvGrpSpPr>
+        <p:cNvPr id="1" name=""/>
+        <p:cNvGrpSpPr/>
+        <p:nvPr/>
+      </p:nvGrpSpPr>
+      <p:grpSpPr>
+        <a:xfrm>
+          <a:off x="0" y="0"/>
+          <a:ext cx="0" cy="0"/>
+          <a:chOff x="0" y="0"/>
+          <a:chExt cx="0" cy="0"/>
+        </a:xfrm>
+      </p:grpSpPr>
+      <p:sp>
+        <p:nvSpPr>
+          <p:cNvPr id="2" name="Header Placeholder 1"/>
+          <p:cNvSpPr>
+            <a:spLocks noGrp="1"/>
+          </p:cNvSpPr>
+          <p:nvPr>
+            <p:ph type="hdr" sz="quarter"/>
+          </p:nvPr>
+        </p:nvSpPr>
+        <p:spPr>
+          <a:xfrm>
+            <a:off x="0" y="0"/>
+            <a:ext cx="2971800" cy="457200"/>
+          </a:xfrm>
+          <a:prstGeom prst="rect">
+            <a:avLst/>
+          </a:prstGeom>
+        </p:spPr>
+        <p:txBody>
+          <a:bodyPr/>
+          <a:lstStyle/>
+          <a:p>
+            <a:pPr/>
+            <a:endParaRPr lang="en"/>
+          </a:p>
+        </p:txBody>
+      </p:sp>
+      <p:sp>
+        <p:nvSpPr>
+          <p:cNvPr id="3" name="Date Placeholder 2"/>
+          <p:cNvSpPr>
+            <a:spLocks noGrp="1"/>
+          </p:cNvSpPr>
+          <p:nvPr>
+            <p:ph type="dt" sz="half" idx="1"/>
+          </p:nvPr>
+        </p:nvSpPr>
+        <p:spPr>
+          <a:xfrm>
+            <a:off x="3884613" y="0"/>
+            <a:ext cx="2971800" cy="457200"/>
+          </a:xfrm>
+          <a:prstGeom prst="rect">
+            <a:avLst/>
+          </a:prstGeom>
+        </p:spPr>
+        <p:txBody>
+          <a:bodyPr/>
+          <a:lstStyle/>
+          <a:p>
+            <a:pPr/>
+            <a:endParaRPr lang="en"/>
+          </a:p>
+        </p:txBody>
+      </p:sp>
+      <p:sp>
+        <p:nvSpPr>
+          <p:cNvPr id="4" name="Slide Image Placeholder 3"/>
+          <p:cNvSpPr>
+            <a:spLocks noGrp="1" noRot="1" noChangeAspect="1"/>
+          </p:cNvSpPr>
+          <p:nvPr>
+            <p:ph type="sldImg" idx="2"/>
+          </p:nvPr>
+        </p:nvSpPr>
+        <p:spPr>
+          <a:xfrm>
+            <a:off x="1143000" y="685800"/>
+            <a:ext cx="4572000" cy="3429000"/>
+          </a:xfrm>
+          <a:prstGeom prst="rect">
+            <a:avLst/>
+          </a:prstGeom>
+        </p:spPr>
+      </p:sp>
+      <p:sp>
+        <p:nvSpPr>
+          <p:cNvPr id="5" name="Notes Placeholder 4"/>
+          <p:cNvSpPr>
+            <a:spLocks noGrp="1"/>
+          </p:cNvSpPr>
+          <p:nvPr>
+            <p:ph type="body" sz="quarter" idx="3"/>
+          </p:nvPr>
+        </p:nvSpPr>
+        <p:spPr>
+          <a:xfrm>
+            <a:off x="685800" y="4343400"/>
+            <a:ext cx="5486400" cy="4114800"/>
+          </a:xfrm>
+          <a:prstGeom prst="rect">
+            <a:avLst/>
+          </a:prstGeom>
+        </p:spPr>
+        <p:txBody>
+          <a:bodyPr/>
+          <a:lstStyle/>
+          <a:p>
+            <a:pPr/>
+            <a:endParaRPr lang="en"/>
+          </a:p>
+        </p:txBody>
+      </p:sp>
+      <p:sp>
+        <p:nvSpPr>
+          <p:cNvPr id="6" name="Footer Placeholder 5"/>
+          <p:cNvSpPr>
+            <a:spLocks noGrp="1"/>
+          </p:cNvSpPr>
+          <p:nvPr>
+            <p:ph type="ftr" sz="quarter" idx="4"/>
+          </p:nvPr>
+        </p:nvSpPr>
+        <p:spPr>
+          <a:xfrm>
+            <a:off x="0" y="8685213"/>
+            <a:ext cx="2971800" cy="457200"/>
+          </a:xfrm>
+          <a:prstGeom prst="rect">
+            <a:avLst/>
+          </a:prstGeom>
+        </p:spPr>
+        <p:txBody>
+          <a:bodyPr/>
+          <a:lstStyle/>
+          <a:p>
+            <a:pPr/>
+            <a:endParaRPr lang="en"/>
+          </a:p>
+        </p:txBody>
+      </p:sp>
+      <p:sp>
+        <p:nvSpPr>
+          <p:cNvPr id="7" name="Slide Number Placeholder 6"/>
+          <p:cNvSpPr>
+            <a:spLocks noGrp="1"/>
+          </p:cNvSpPr>
+          <p:nvPr>
+            <p:ph type="sldNum" sz="quarter" idx="5"/>
+          </p:nvPr>
+        </p:nvSpPr>
+        <p:spPr>
+          <a:xfrm>
+            <a:off x="3884613" y="8685213"/>
+            <a:ext cx="2971800" cy="457200"/>
+          </a:xfrm>
+          <a:prstGeom prst="rect">
+            <a:avLst/>
+          </a:prstGeom>
+        </p:spPr>
+        <p:txBody>
+          <a:bodyPr/>
+          <a:lstStyle/>
+          <a:p>
+            <a:pPr/>
+            <a:endParaRPr lang="en"/>
+          </a:p>
+        </p:txBody>
+      </p:sp>
+    </p:spTree>
+  </p:cSld>
+  <p:clrMap bg1="lt1" tx1="dk1" bg2="lt2" tx2="dk2" accent1="accent1" accent2="accent2" accent3="accent3" accent4="accent4" accent5="accent5" accent6="accent6" hlink="hlink" folHlink="folHlink"/>
+  <p:hf/>
+  <p:notesStyle>
+    <a:lvl1pPr marL="0" algn="l">
+      <a:defRPr sz="1200" lang="en"/>
+    </a:lvl1pPr>
+  </p:notesStyle>
+</p:notesMaster>
+</file>
+
+<file path=ppt/notesMasters/notesMaster3.xml><?xml version="1.0" encoding="utf-8"?>
+<p:notesMaster xmlns:a="http://schemas.openxmlformats.org/drawingml/2006/main" xmlns:r="http://schemas.openxmlformats.org/officeDocument/2006/relationships" xmlns:p="http://schemas.openxmlformats.org/presentationml/2006/main">
+  <p:cSld>
+    <p:spTree>
+      <p:nvGrpSpPr>
+        <p:cNvPr id="1" name=""/>
+        <p:cNvGrpSpPr/>
+        <p:nvPr/>
+      </p:nvGrpSpPr>
+      <p:grpSpPr>
+        <a:xfrm>
+          <a:off x="0" y="0"/>
+          <a:ext cx="0" cy="0"/>
+          <a:chOff x="0" y="0"/>
+          <a:chExt cx="0" cy="0"/>
+        </a:xfrm>
+      </p:grpSpPr>
+      <p:sp>
+        <p:nvSpPr>
+          <p:cNvPr id="2" name="Header Placeholder 1"/>
+          <p:cNvSpPr>
+            <a:spLocks noGrp="1"/>
+          </p:cNvSpPr>
+          <p:nvPr>
+            <p:ph type="hdr" sz="quarter"/>
+          </p:nvPr>
+        </p:nvSpPr>
+        <p:spPr>
+          <a:xfrm>
+            <a:off x="0" y="0"/>
+            <a:ext cx="2971800" cy="457200"/>
+          </a:xfrm>
+          <a:prstGeom prst="rect">
+            <a:avLst/>
+          </a:prstGeom>
+        </p:spPr>
+        <p:txBody>
+          <a:bodyPr/>
+          <a:lstStyle/>
+          <a:p>
+            <a:pPr/>
+            <a:endParaRPr lang="en"/>
+          </a:p>
+        </p:txBody>
+      </p:sp>
+      <p:sp>
+        <p:nvSpPr>
+          <p:cNvPr id="3" name="Date Placeholder 2"/>
+          <p:cNvSpPr>
+            <a:spLocks noGrp="1"/>
+          </p:cNvSpPr>
+          <p:nvPr>
+            <p:ph type="dt" sz="half" idx="1"/>
+          </p:nvPr>
+        </p:nvSpPr>
+        <p:spPr>
+          <a:xfrm>
+            <a:off x="3884613" y="0"/>
+            <a:ext cx="2971800" cy="457200"/>
+          </a:xfrm>
+          <a:prstGeom prst="rect">
+            <a:avLst/>
+          </a:prstGeom>
+        </p:spPr>
+        <p:txBody>
+          <a:bodyPr/>
+          <a:lstStyle/>
+          <a:p>
+            <a:pPr/>
+            <a:endParaRPr lang="en"/>
+          </a:p>
+        </p:txBody>
+      </p:sp>
+      <p:sp>
+        <p:nvSpPr>
+          <p:cNvPr id="4" name="Slide Image Placeholder 3"/>
+          <p:cNvSpPr>
+            <a:spLocks noGrp="1" noRot="1" noChangeAspect="1"/>
+          </p:cNvSpPr>
+          <p:nvPr>
+            <p:ph type="sldImg" idx="2"/>
+          </p:nvPr>
+        </p:nvSpPr>
+        <p:spPr>
+          <a:xfrm>
+            <a:off x="1143000" y="685800"/>
+            <a:ext cx="4572000" cy="3429000"/>
+          </a:xfrm>
+          <a:prstGeom prst="rect">
+            <a:avLst/>
+          </a:prstGeom>
+        </p:spPr>
+      </p:sp>
+      <p:sp>
+        <p:nvSpPr>
+          <p:cNvPr id="5" name="Notes Placeholder 4"/>
+          <p:cNvSpPr>
+            <a:spLocks noGrp="1"/>
+          </p:cNvSpPr>
+          <p:nvPr>
+            <p:ph type="body" sz="quarter" idx="3"/>
+          </p:nvPr>
+        </p:nvSpPr>
+        <p:spPr>
+          <a:xfrm>
+            <a:off x="685800" y="4343400"/>
+            <a:ext cx="5486400" cy="4114800"/>
+          </a:xfrm>
+          <a:prstGeom prst="rect">
+            <a:avLst/>
+          </a:prstGeom>
+        </p:spPr>
+        <p:txBody>
+          <a:bodyPr/>
+          <a:lstStyle/>
+          <a:p>
+            <a:pPr/>
+            <a:endParaRPr lang="en"/>
+          </a:p>
+        </p:txBody>
+      </p:sp>
+      <p:sp>
+        <p:nvSpPr>
+          <p:cNvPr id="6" name="Footer Placeholder 5"/>
+          <p:cNvSpPr>
+            <a:spLocks noGrp="1"/>
+          </p:cNvSpPr>
+          <p:nvPr>
+            <p:ph type="ftr" sz="quarter" idx="4"/>
+          </p:nvPr>
+        </p:nvSpPr>
+        <p:spPr>
+          <a:xfrm>
+            <a:off x="0" y="8685213"/>
+            <a:ext cx="2971800" cy="457200"/>
+          </a:xfrm>
+          <a:prstGeom prst="rect">
+            <a:avLst/>
+          </a:prstGeom>
+        </p:spPr>
+        <p:txBody>
+          <a:bodyPr/>
+          <a:lstStyle/>
+          <a:p>
+            <a:pPr/>
+            <a:endParaRPr lang="en"/>
+          </a:p>
+        </p:txBody>
+      </p:sp>
+      <p:sp>
+        <p:nvSpPr>
+          <p:cNvPr id="7" name="Slide Number Placeholder 6"/>
+          <p:cNvSpPr>
+            <a:spLocks noGrp="1"/>
+          </p:cNvSpPr>
+          <p:nvPr>
+            <p:ph type="sldNum" sz="quarter" idx="5"/>
+          </p:nvPr>
+        </p:nvSpPr>
+        <p:spPr>
+          <a:xfrm>
+            <a:off x="3884613" y="8685213"/>
+            <a:ext cx="2971800" cy="457200"/>
+          </a:xfrm>
+          <a:prstGeom prst="rect">
+            <a:avLst/>
+          </a:prstGeom>
+        </p:spPr>
+        <p:txBody>
+          <a:bodyPr/>
+          <a:lstStyle/>
+          <a:p>
+            <a:pPr/>
+            <a:endParaRPr lang="en"/>
+          </a:p>
+        </p:txBody>
+      </p:sp>
+    </p:spTree>
+  </p:cSld>
+  <p:clrMap bg1="lt1" tx1="dk1" bg2="lt2" tx2="dk2" accent1="accent1" accent2="accent2" accent3="accent3" accent4="accent4" accent5="accent5" accent6="accent6" hlink="hlink" folHlink="folHlink"/>
+  <p:hf/>
+  <p:notesStyle>
+    <a:lvl1pPr marL="0" algn="l">
+      <a:defRPr sz="1200" lang="en"/>
+    </a:lvl1pPr>
+  </p:notesStyle>
+</p:notesMaster>
+</file>
+
 <file path=ppt/notesSlides/notesSlide1.xml><?xml version="1.0" encoding="utf-8"?>
 <p:notes xmlns:a="http://schemas.openxmlformats.org/drawingml/2006/main" xmlns:r="http://schemas.openxmlformats.org/officeDocument/2006/relationships" xmlns:p="http://schemas.openxmlformats.org/presentationml/2006/main">
   <p:cSld>
@@ -1106,6 +1484,170 @@
         <p14:creationId xmlns:p14="http://schemas.microsoft.com/office/powerpoint/2010/main" val="1024086991"/>
       </p:ext>
     </p:extLst>
+  </p:cSld>
+  <p:clrMapOvr>
+    <a:masterClrMapping/>
+  </p:clrMapOvr>
+</p:notes>
+</file>
+
+<file path=ppt/notesSlides/notesSlide6.xml><?xml version="1.0" encoding="utf-8"?>
+<p:notes xmlns:a="http://schemas.openxmlformats.org/drawingml/2006/main" xmlns:r="http://schemas.openxmlformats.org/officeDocument/2006/relationships" xmlns:p="http://schemas.openxmlformats.org/presentationml/2006/main">
+  <p:cSld>
+    <p:spTree>
+      <p:nvGrpSpPr>
+        <p:cNvPr id="1" name=""/>
+        <p:cNvGrpSpPr/>
+        <p:nvPr/>
+      </p:nvGrpSpPr>
+      <p:grpSpPr>
+        <a:xfrm>
+          <a:off x="0" y="0"/>
+          <a:ext cx="0" cy="0"/>
+          <a:chOff x="0" y="0"/>
+          <a:chExt cx="0" cy="0"/>
+        </a:xfrm>
+      </p:grpSpPr>
+      <p:sp>
+        <p:nvSpPr>
+          <p:cNvPr id="2" name="Slide Image Placeholder 1"/>
+          <p:cNvSpPr>
+            <a:spLocks noGrp="1" noRot="1" noChangeAspect="1"/>
+          </p:cNvSpPr>
+          <p:nvPr>
+            <p:ph type="sldImg" idx="2"/>
+          </p:nvPr>
+        </p:nvSpPr>
+        <p:spPr/>
+      </p:sp>
+      <p:sp>
+        <p:nvSpPr>
+          <p:cNvPr id="3" name="Notes Placeholder 2"/>
+          <p:cNvSpPr>
+            <a:spLocks noGrp="1"/>
+          </p:cNvSpPr>
+          <p:nvPr>
+            <p:ph type="body" sz="quarter" idx="3"/>
+          </p:nvPr>
+        </p:nvSpPr>
+        <p:spPr/>
+        <p:txBody>
+          <a:bodyPr/>
+          <a:lstStyle/>
+          <a:p>
+            <a:pPr/>
+            <a:r>
+              <a:rPr lang="en" dirty="0"/>
+              <a:t>Native chart page</a:t>
+            </a:r>
+          </a:p>
+          <a:p>
+            <a:pPr/>
+            <a:endParaRPr lang="en" dirty="0"/>
+          </a:p>
+          <a:p>
+            <a:pPr/>
+            <a:r>
+              <a:rPr lang="en" dirty="0"/>
+              <a:t>This page is rendered by the deep engine. The bar chart is a native, editable PowerPoint chart, not a picture.</a:t>
+            </a:r>
+          </a:p>
+          <a:p>
+            <a:pPr/>
+            <a:endParaRPr lang="en" dirty="0"/>
+          </a:p>
+          <a:p>
+            <a:pPr/>
+            <a:r>
+              <a:rPr lang="en" dirty="0"/>
+              <a:t>Rendering took twelve seconds for the IR, four seconds for pptwise, nine for the deep engine, and one second for the merge.</a:t>
+            </a:r>
+          </a:p>
+        </p:txBody>
+      </p:sp>
+    </p:spTree>
+  </p:cSld>
+  <p:clrMapOvr>
+    <a:masterClrMapping/>
+  </p:clrMapOvr>
+</p:notes>
+</file>
+
+<file path=ppt/notesSlides/notesSlide7.xml><?xml version="1.0" encoding="utf-8"?>
+<p:notes xmlns:a="http://schemas.openxmlformats.org/drawingml/2006/main" xmlns:r="http://schemas.openxmlformats.org/officeDocument/2006/relationships" xmlns:p="http://schemas.openxmlformats.org/presentationml/2006/main">
+  <p:cSld>
+    <p:spTree>
+      <p:nvGrpSpPr>
+        <p:cNvPr id="1" name=""/>
+        <p:cNvGrpSpPr/>
+        <p:nvPr/>
+      </p:nvGrpSpPr>
+      <p:grpSpPr>
+        <a:xfrm>
+          <a:off x="0" y="0"/>
+          <a:ext cx="0" cy="0"/>
+          <a:chOff x="0" y="0"/>
+          <a:chExt cx="0" cy="0"/>
+        </a:xfrm>
+      </p:grpSpPr>
+      <p:sp>
+        <p:nvSpPr>
+          <p:cNvPr id="2" name="Slide Image Placeholder 1"/>
+          <p:cNvSpPr>
+            <a:spLocks noGrp="1" noRot="1" noChangeAspect="1"/>
+          </p:cNvSpPr>
+          <p:nvPr>
+            <p:ph type="sldImg" idx="2"/>
+          </p:nvPr>
+        </p:nvSpPr>
+        <p:spPr/>
+      </p:sp>
+      <p:sp>
+        <p:nvSpPr>
+          <p:cNvPr id="3" name="Notes Placeholder 2"/>
+          <p:cNvSpPr>
+            <a:spLocks noGrp="1"/>
+          </p:cNvSpPr>
+          <p:nvPr>
+            <p:ph type="body" sz="quarter" idx="3"/>
+          </p:nvPr>
+        </p:nvSpPr>
+        <p:spPr/>
+        <p:txBody>
+          <a:bodyPr/>
+          <a:lstStyle/>
+          <a:p>
+            <a:pPr/>
+            <a:r>
+              <a:rPr lang="en" dirty="0"/>
+              <a:t>Native table page</a:t>
+            </a:r>
+          </a:p>
+          <a:p>
+            <a:pPr/>
+            <a:endParaRPr lang="en" dirty="0"/>
+          </a:p>
+          <a:p>
+            <a:pPr/>
+            <a:r>
+              <a:rPr lang="en" dirty="0"/>
+              <a:t>The table compares what each engine owns. pptwise handles bullets and cards, while ppt-master handles charts, tables and formulas.</a:t>
+            </a:r>
+          </a:p>
+          <a:p>
+            <a:pPr/>
+            <a:endParaRPr lang="en" dirty="0"/>
+          </a:p>
+          <a:p>
+            <a:pPr/>
+            <a:r>
+              <a:rPr lang="en" dirty="0"/>
+              <a:t>Only the deep engine output stays editable as native objects.</a:t>
+            </a:r>
+          </a:p>
+        </p:txBody>
+      </p:sp>
+    </p:spTree>
   </p:cSld>
   <p:clrMapOvr>
     <a:masterClrMapping/>
@@ -2151,7 +2693,7 @@
 </file>
 
 <file path=ppt/slides/slide3.xml><?xml version="1.0" encoding="utf-8"?>
-<p:sld xmlns:a="http://schemas.openxmlformats.org/drawingml/2006/main" xmlns:r="http://schemas.openxmlformats.org/officeDocument/2006/relationships" xmlns:p="http://schemas.openxmlformats.org/presentationml/2006/main">
+<p:sld xmlns:a="http://schemas.openxmlformats.org/drawingml/2006/main" xmlns:c="http://schemas.openxmlformats.org/drawingml/2006/chart" xmlns:p="http://schemas.openxmlformats.org/presentationml/2006/main" xmlns:p14="http://schemas.microsoft.com/office/powerpoint/2010/main" xmlns:r="http://schemas.openxmlformats.org/officeDocument/2006/relationships">
   <p:cSld>
     <p:bg>
       <p:bgPr>
@@ -2266,10 +2808,43 @@
         </p:xfrm>
         <a:graphic>
           <a:graphicData uri="http://schemas.openxmlformats.org/drawingml/2006/chart">
-            <c:chart xmlns:c="http://schemas.openxmlformats.org/drawingml/2006/chart" r:id="rId2"/>
+            <c:chart r:id="rId2"/>
           </a:graphicData>
         </a:graphic>
       </p:graphicFrame>
+      <p:pic>
+        <p:nvPicPr>
+          <p:cNvPr id="6" name="PPT Master narration: narration1.mp3">
+            <a:hlinkClick r:id="" action="ppaction://media"/>
+          </p:cNvPr>
+          <p:cNvPicPr>
+            <a:picLocks noChangeAspect="1"/>
+          </p:cNvPicPr>
+          <p:nvPr>
+            <a:audioFile r:link="rId5"/>
+            <p:extLst>
+              <p:ext uri="{DAA4B4D4-6D71-4841-9C94-3DE7FCFB9230}">
+                <p14:media r:embed="rId4"/>
+              </p:ext>
+            </p:extLst>
+          </p:nvPr>
+        </p:nvPicPr>
+        <p:blipFill>
+          <a:blip r:embed="rId6"/>
+          <a:stretch>
+            <a:fillRect/>
+          </a:stretch>
+        </p:blipFill>
+        <p:spPr>
+          <a:xfrm>
+            <a:off x="-457200" y="-457200"/>
+            <a:ext cx="457200" cy="457200"/>
+          </a:xfrm>
+          <a:prstGeom prst="rect">
+            <a:avLst/>
+          </a:prstGeom>
+        </p:spPr>
+      </p:pic>
     </p:spTree>
   </p:cSld>
   <p:clrMapOvr>
@@ -2436,7 +3011,7 @@
 </file>
 
 <file path=ppt/slides/slide4.xml><?xml version="1.0" encoding="utf-8"?>
-<p:sld xmlns:a="http://schemas.openxmlformats.org/drawingml/2006/main" xmlns:r="http://schemas.openxmlformats.org/officeDocument/2006/relationships" xmlns:p="http://schemas.openxmlformats.org/presentationml/2006/main">
+<p:sld xmlns:a="http://schemas.openxmlformats.org/drawingml/2006/main" xmlns:p="http://schemas.openxmlformats.org/presentationml/2006/main" xmlns:p14="http://schemas.microsoft.com/office/powerpoint/2010/main" xmlns:r="http://schemas.openxmlformats.org/officeDocument/2006/relationships">
   <p:cSld>
     <p:bg>
       <p:bgPr>
@@ -3011,6 +3586,39 @@
           </a:graphicData>
         </a:graphic>
       </p:graphicFrame>
+      <p:pic>
+        <p:nvPicPr>
+          <p:cNvPr id="6" name="PPT Master narration: narration2.mp3">
+            <a:hlinkClick r:id="" action="ppaction://media"/>
+          </p:cNvPr>
+          <p:cNvPicPr>
+            <a:picLocks noChangeAspect="1"/>
+          </p:cNvPicPr>
+          <p:nvPr>
+            <a:audioFile r:link="rId4"/>
+            <p:extLst>
+              <p:ext uri="{DAA4B4D4-6D71-4841-9C94-3DE7FCFB9230}">
+                <p14:media r:embed="rId3"/>
+              </p:ext>
+            </p:extLst>
+          </p:nvPr>
+        </p:nvPicPr>
+        <p:blipFill>
+          <a:blip r:embed="rId5"/>
+          <a:stretch>
+            <a:fillRect/>
+          </a:stretch>
+        </p:blipFill>
+        <p:spPr>
+          <a:xfrm>
+            <a:off x="-457200" y="-457200"/>
+            <a:ext cx="457200" cy="457200"/>
+          </a:xfrm>
+          <a:prstGeom prst="rect">
+            <a:avLst/>
+          </a:prstGeom>
+        </p:spPr>
+      </p:pic>
     </p:spTree>
   </p:cSld>
   <p:clrMapOvr>
@@ -3766,4 +4374,644 @@
     </a:ext>
   </a:extLst>
 </a:theme>
+</file>
+
+<file path=ppt/theme/theme2.xml><?xml version="1.0" encoding="utf-8"?>
+<a:theme xmlns:a="http://schemas.openxmlformats.org/drawingml/2006/main" name="deep-p03-p04">
+  <a:themeElements>
+    <a:clrScheme name="deep-p03-p04">
+      <a:dk1>
+        <a:sysClr val="windowText" lastClr="000000"/>
+      </a:dk1>
+      <a:lt1>
+        <a:sysClr val="window" lastClr="FFFFFF"/>
+      </a:lt1>
+      <a:dk2>
+        <a:srgbClr val="1F497D"/>
+      </a:dk2>
+      <a:lt2>
+        <a:srgbClr val="EEECE1"/>
+      </a:lt2>
+      <a:accent1>
+        <a:srgbClr val="4F81BD"/>
+      </a:accent1>
+      <a:accent2>
+        <a:srgbClr val="C0504D"/>
+      </a:accent2>
+      <a:accent3>
+        <a:srgbClr val="9BBB59"/>
+      </a:accent3>
+      <a:accent4>
+        <a:srgbClr val="8064A2"/>
+      </a:accent4>
+      <a:accent5>
+        <a:srgbClr val="4BACC6"/>
+      </a:accent5>
+      <a:accent6>
+        <a:srgbClr val="F79646"/>
+      </a:accent6>
+      <a:hlink>
+        <a:srgbClr val="0000FF"/>
+      </a:hlink>
+      <a:folHlink>
+        <a:srgbClr val="800080"/>
+      </a:folHlink>
+    </a:clrScheme>
+    <a:fontScheme name="deep-p03-p04">
+      <a:majorFont>
+        <a:latin typeface="Arial"/>
+        <a:ea typeface="Microsoft YaHei"/>
+        <a:cs typeface="Arial"/>
+        <a:font script="Jpan" typeface="Microsoft YaHei"/>
+        <a:font script="Hang" typeface="Microsoft YaHei"/>
+        <a:font script="Hans" typeface="Microsoft YaHei"/>
+        <a:font script="Hant" typeface="Microsoft YaHei"/>
+        <a:font script="Arab" typeface="Times New Roman"/>
+        <a:font script="Hebr" typeface="Times New Roman"/>
+        <a:font script="Thai" typeface="Angsana New"/>
+        <a:font script="Ethi" typeface="Nyala"/>
+        <a:font script="Beng" typeface="Vrinda"/>
+        <a:font script="Gujr" typeface="Shruti"/>
+        <a:font script="Khmr" typeface="MoolBoran"/>
+        <a:font script="Knda" typeface="Tunga"/>
+        <a:font script="Guru" typeface="Raavi"/>
+        <a:font script="Cans" typeface="Euphemia"/>
+        <a:font script="Cher" typeface="Plantagenet Cherokee"/>
+        <a:font script="Yiii" typeface="Microsoft Yi Baiti"/>
+        <a:font script="Tibt" typeface="Microsoft Himalaya"/>
+        <a:font script="Thaa" typeface="MV Boli"/>
+        <a:font script="Deva" typeface="Mangal"/>
+        <a:font script="Telu" typeface="Gautami"/>
+        <a:font script="Taml" typeface="Latha"/>
+        <a:font script="Syrc" typeface="Estrangelo Edessa"/>
+        <a:font script="Orya" typeface="Kalinga"/>
+        <a:font script="Mlym" typeface="Kartika"/>
+        <a:font script="Laoo" typeface="DokChampa"/>
+        <a:font script="Sinh" typeface="Iskoola Pota"/>
+        <a:font script="Mong" typeface="Mongolian Baiti"/>
+        <a:font script="Viet" typeface="Times New Roman"/>
+        <a:font script="Uigh" typeface="Microsoft Uighur"/>
+        <a:font script="Geor" typeface="Sylfaen"/>
+      </a:majorFont>
+      <a:minorFont>
+        <a:latin typeface="Arial"/>
+        <a:ea typeface="Microsoft YaHei"/>
+        <a:cs typeface="Arial"/>
+        <a:font script="Jpan" typeface="Microsoft YaHei"/>
+        <a:font script="Hang" typeface="Microsoft YaHei"/>
+        <a:font script="Hans" typeface="Microsoft YaHei"/>
+        <a:font script="Hant" typeface="Microsoft YaHei"/>
+        <a:font script="Arab" typeface="Arial"/>
+        <a:font script="Hebr" typeface="Arial"/>
+        <a:font script="Thai" typeface="Cordia New"/>
+        <a:font script="Ethi" typeface="Nyala"/>
+        <a:font script="Beng" typeface="Vrinda"/>
+        <a:font script="Gujr" typeface="Shruti"/>
+        <a:font script="Khmr" typeface="DaunPenh"/>
+        <a:font script="Knda" typeface="Tunga"/>
+        <a:font script="Guru" typeface="Raavi"/>
+        <a:font script="Cans" typeface="Euphemia"/>
+        <a:font script="Cher" typeface="Plantagenet Cherokee"/>
+        <a:font script="Yiii" typeface="Microsoft Yi Baiti"/>
+        <a:font script="Tibt" typeface="Microsoft Himalaya"/>
+        <a:font script="Thaa" typeface="MV Boli"/>
+        <a:font script="Deva" typeface="Mangal"/>
+        <a:font script="Telu" typeface="Gautami"/>
+        <a:font script="Taml" typeface="Latha"/>
+        <a:font script="Syrc" typeface="Estrangelo Edessa"/>
+        <a:font script="Orya" typeface="Kalinga"/>
+        <a:font script="Mlym" typeface="Kartika"/>
+        <a:font script="Laoo" typeface="DokChampa"/>
+        <a:font script="Sinh" typeface="Iskoola Pota"/>
+        <a:font script="Mong" typeface="Mongolian Baiti"/>
+        <a:font script="Viet" typeface="Arial"/>
+        <a:font script="Uigh" typeface="Microsoft Uighur"/>
+        <a:font script="Geor" typeface="Sylfaen"/>
+      </a:minorFont>
+    </a:fontScheme>
+    <a:fmtScheme name="deep-p03-p04">
+      <a:fillStyleLst>
+        <a:solidFill>
+          <a:schemeClr val="phClr"/>
+        </a:solidFill>
+        <a:gradFill rotWithShape="1">
+          <a:gsLst>
+            <a:gs pos="0">
+              <a:schemeClr val="phClr">
+                <a:tint val="50000"/>
+                <a:satMod val="300000"/>
+              </a:schemeClr>
+            </a:gs>
+            <a:gs pos="35000">
+              <a:schemeClr val="phClr">
+                <a:tint val="37000"/>
+                <a:satMod val="300000"/>
+              </a:schemeClr>
+            </a:gs>
+            <a:gs pos="100000">
+              <a:schemeClr val="phClr">
+                <a:tint val="15000"/>
+                <a:satMod val="350000"/>
+              </a:schemeClr>
+            </a:gs>
+          </a:gsLst>
+          <a:lin ang="16200000" scaled="1"/>
+        </a:gradFill>
+        <a:gradFill rotWithShape="1">
+          <a:gsLst>
+            <a:gs pos="0">
+              <a:schemeClr val="phClr">
+                <a:tint val="100000"/>
+                <a:shade val="100000"/>
+                <a:satMod val="130000"/>
+              </a:schemeClr>
+            </a:gs>
+            <a:gs pos="100000">
+              <a:schemeClr val="phClr">
+                <a:tint val="50000"/>
+                <a:shade val="100000"/>
+                <a:satMod val="350000"/>
+              </a:schemeClr>
+            </a:gs>
+          </a:gsLst>
+          <a:lin ang="16200000" scaled="0"/>
+        </a:gradFill>
+      </a:fillStyleLst>
+      <a:lnStyleLst>
+        <a:ln w="9525" cap="flat" cmpd="sng" algn="ctr">
+          <a:solidFill>
+            <a:schemeClr val="phClr">
+              <a:shade val="95000"/>
+              <a:satMod val="105000"/>
+            </a:schemeClr>
+          </a:solidFill>
+          <a:prstDash val="solid"/>
+        </a:ln>
+        <a:ln w="25400" cap="flat" cmpd="sng" algn="ctr">
+          <a:solidFill>
+            <a:schemeClr val="phClr"/>
+          </a:solidFill>
+          <a:prstDash val="solid"/>
+        </a:ln>
+        <a:ln w="38100" cap="flat" cmpd="sng" algn="ctr">
+          <a:solidFill>
+            <a:schemeClr val="phClr"/>
+          </a:solidFill>
+          <a:prstDash val="solid"/>
+        </a:ln>
+      </a:lnStyleLst>
+      <a:effectStyleLst>
+        <a:effectStyle>
+          <a:effectLst>
+            <a:outerShdw blurRad="40000" dist="20000" dir="5400000" rotWithShape="0">
+              <a:srgbClr val="000000">
+                <a:alpha val="38000"/>
+              </a:srgbClr>
+            </a:outerShdw>
+          </a:effectLst>
+        </a:effectStyle>
+        <a:effectStyle>
+          <a:effectLst>
+            <a:outerShdw blurRad="40000" dist="23000" dir="5400000" rotWithShape="0">
+              <a:srgbClr val="000000">
+                <a:alpha val="35000"/>
+              </a:srgbClr>
+            </a:outerShdw>
+          </a:effectLst>
+        </a:effectStyle>
+        <a:effectStyle>
+          <a:effectLst>
+            <a:outerShdw blurRad="40000" dist="23000" dir="5400000" rotWithShape="0">
+              <a:srgbClr val="000000">
+                <a:alpha val="35000"/>
+              </a:srgbClr>
+            </a:outerShdw>
+          </a:effectLst>
+          <a:scene3d>
+            <a:camera prst="orthographicFront">
+              <a:rot lat="0" lon="0" rev="0"/>
+            </a:camera>
+            <a:lightRig rig="threePt" dir="t">
+              <a:rot lat="0" lon="0" rev="1200000"/>
+            </a:lightRig>
+          </a:scene3d>
+          <a:sp3d>
+            <a:bevelT w="63500" h="25400"/>
+          </a:sp3d>
+        </a:effectStyle>
+      </a:effectStyleLst>
+      <a:bgFillStyleLst>
+        <a:solidFill>
+          <a:schemeClr val="phClr"/>
+        </a:solidFill>
+        <a:gradFill rotWithShape="1">
+          <a:gsLst>
+            <a:gs pos="0">
+              <a:schemeClr val="phClr">
+                <a:tint val="40000"/>
+                <a:satMod val="350000"/>
+              </a:schemeClr>
+            </a:gs>
+            <a:gs pos="40000">
+              <a:schemeClr val="phClr">
+                <a:tint val="45000"/>
+                <a:shade val="99000"/>
+                <a:satMod val="350000"/>
+              </a:schemeClr>
+            </a:gs>
+            <a:gs pos="100000">
+              <a:schemeClr val="phClr">
+                <a:shade val="20000"/>
+                <a:satMod val="255000"/>
+              </a:schemeClr>
+            </a:gs>
+          </a:gsLst>
+          <a:path path="circle">
+            <a:fillToRect l="50000" t="-80000" r="50000" b="180000"/>
+          </a:path>
+        </a:gradFill>
+        <a:gradFill rotWithShape="1">
+          <a:gsLst>
+            <a:gs pos="0">
+              <a:schemeClr val="phClr">
+                <a:tint val="80000"/>
+                <a:satMod val="300000"/>
+              </a:schemeClr>
+            </a:gs>
+            <a:gs pos="100000">
+              <a:schemeClr val="phClr">
+                <a:shade val="30000"/>
+                <a:satMod val="200000"/>
+              </a:schemeClr>
+            </a:gs>
+          </a:gsLst>
+          <a:path path="circle">
+            <a:fillToRect l="50000" t="50000" r="50000" b="50000"/>
+          </a:path>
+        </a:gradFill>
+      </a:bgFillStyleLst>
+    </a:fmtScheme>
+  </a:themeElements>
+  <a:objectDefaults>
+    <a:spDef>
+      <a:spPr/>
+      <a:bodyPr/>
+      <a:lstStyle/>
+      <a:style>
+        <a:lnRef idx="1">
+          <a:schemeClr val="accent1"/>
+        </a:lnRef>
+        <a:fillRef idx="3">
+          <a:schemeClr val="accent1"/>
+        </a:fillRef>
+        <a:effectRef idx="2">
+          <a:schemeClr val="accent1"/>
+        </a:effectRef>
+        <a:fontRef idx="minor">
+          <a:schemeClr val="lt1"/>
+        </a:fontRef>
+      </a:style>
+    </a:spDef>
+    <a:lnDef>
+      <a:spPr/>
+      <a:bodyPr/>
+      <a:lstStyle/>
+      <a:style>
+        <a:lnRef idx="2">
+          <a:schemeClr val="accent1"/>
+        </a:lnRef>
+        <a:fillRef idx="0">
+          <a:schemeClr val="accent1"/>
+        </a:fillRef>
+        <a:effectRef idx="1">
+          <a:schemeClr val="accent1"/>
+        </a:effectRef>
+        <a:fontRef idx="minor">
+          <a:schemeClr val="tx1"/>
+        </a:fontRef>
+      </a:style>
+    </a:lnDef>
+  </a:objectDefaults>
+  <a:extraClrSchemeLst/>
+</a:theme>
+</file>
+
+<file path=ppt/theme/theme3.xml><?xml version="1.0" encoding="utf-8"?>
+<a:theme xmlns:a="http://schemas.openxmlformats.org/drawingml/2006/main" name="deep-p03-p04">
+  <a:themeElements>
+    <a:clrScheme name="deep-p03-p04">
+      <a:dk1>
+        <a:sysClr val="windowText" lastClr="000000"/>
+      </a:dk1>
+      <a:lt1>
+        <a:sysClr val="window" lastClr="FFFFFF"/>
+      </a:lt1>
+      <a:dk2>
+        <a:srgbClr val="1F497D"/>
+      </a:dk2>
+      <a:lt2>
+        <a:srgbClr val="EEECE1"/>
+      </a:lt2>
+      <a:accent1>
+        <a:srgbClr val="4F81BD"/>
+      </a:accent1>
+      <a:accent2>
+        <a:srgbClr val="C0504D"/>
+      </a:accent2>
+      <a:accent3>
+        <a:srgbClr val="9BBB59"/>
+      </a:accent3>
+      <a:accent4>
+        <a:srgbClr val="8064A2"/>
+      </a:accent4>
+      <a:accent5>
+        <a:srgbClr val="4BACC6"/>
+      </a:accent5>
+      <a:accent6>
+        <a:srgbClr val="F79646"/>
+      </a:accent6>
+      <a:hlink>
+        <a:srgbClr val="0000FF"/>
+      </a:hlink>
+      <a:folHlink>
+        <a:srgbClr val="800080"/>
+      </a:folHlink>
+    </a:clrScheme>
+    <a:fontScheme name="deep-p03-p04">
+      <a:majorFont>
+        <a:latin typeface="Arial"/>
+        <a:ea typeface="Microsoft YaHei"/>
+        <a:cs typeface="Arial"/>
+        <a:font script="Jpan" typeface="Microsoft YaHei"/>
+        <a:font script="Hang" typeface="Microsoft YaHei"/>
+        <a:font script="Hans" typeface="Microsoft YaHei"/>
+        <a:font script="Hant" typeface="Microsoft YaHei"/>
+        <a:font script="Arab" typeface="Times New Roman"/>
+        <a:font script="Hebr" typeface="Times New Roman"/>
+        <a:font script="Thai" typeface="Angsana New"/>
+        <a:font script="Ethi" typeface="Nyala"/>
+        <a:font script="Beng" typeface="Vrinda"/>
+        <a:font script="Gujr" typeface="Shruti"/>
+        <a:font script="Khmr" typeface="MoolBoran"/>
+        <a:font script="Knda" typeface="Tunga"/>
+        <a:font script="Guru" typeface="Raavi"/>
+        <a:font script="Cans" typeface="Euphemia"/>
+        <a:font script="Cher" typeface="Plantagenet Cherokee"/>
+        <a:font script="Yiii" typeface="Microsoft Yi Baiti"/>
+        <a:font script="Tibt" typeface="Microsoft Himalaya"/>
+        <a:font script="Thaa" typeface="MV Boli"/>
+        <a:font script="Deva" typeface="Mangal"/>
+        <a:font script="Telu" typeface="Gautami"/>
+        <a:font script="Taml" typeface="Latha"/>
+        <a:font script="Syrc" typeface="Estrangelo Edessa"/>
+        <a:font script="Orya" typeface="Kalinga"/>
+        <a:font script="Mlym" typeface="Kartika"/>
+        <a:font script="Laoo" typeface="DokChampa"/>
+        <a:font script="Sinh" typeface="Iskoola Pota"/>
+        <a:font script="Mong" typeface="Mongolian Baiti"/>
+        <a:font script="Viet" typeface="Times New Roman"/>
+        <a:font script="Uigh" typeface="Microsoft Uighur"/>
+        <a:font script="Geor" typeface="Sylfaen"/>
+      </a:majorFont>
+      <a:minorFont>
+        <a:latin typeface="Arial"/>
+        <a:ea typeface="Microsoft YaHei"/>
+        <a:cs typeface="Arial"/>
+        <a:font script="Jpan" typeface="Microsoft YaHei"/>
+        <a:font script="Hang" typeface="Microsoft YaHei"/>
+        <a:font script="Hans" typeface="Microsoft YaHei"/>
+        <a:font script="Hant" typeface="Microsoft YaHei"/>
+        <a:font script="Arab" typeface="Arial"/>
+        <a:font script="Hebr" typeface="Arial"/>
+        <a:font script="Thai" typeface="Cordia New"/>
+        <a:font script="Ethi" typeface="Nyala"/>
+        <a:font script="Beng" typeface="Vrinda"/>
+        <a:font script="Gujr" typeface="Shruti"/>
+        <a:font script="Khmr" typeface="DaunPenh"/>
+        <a:font script="Knda" typeface="Tunga"/>
+        <a:font script="Guru" typeface="Raavi"/>
+        <a:font script="Cans" typeface="Euphemia"/>
+        <a:font script="Cher" typeface="Plantagenet Cherokee"/>
+        <a:font script="Yiii" typeface="Microsoft Yi Baiti"/>
+        <a:font script="Tibt" typeface="Microsoft Himalaya"/>
+        <a:font script="Thaa" typeface="MV Boli"/>
+        <a:font script="Deva" typeface="Mangal"/>
+        <a:font script="Telu" typeface="Gautami"/>
+        <a:font script="Taml" typeface="Latha"/>
+        <a:font script="Syrc" typeface="Estrangelo Edessa"/>
+        <a:font script="Orya" typeface="Kalinga"/>
+        <a:font script="Mlym" typeface="Kartika"/>
+        <a:font script="Laoo" typeface="DokChampa"/>
+        <a:font script="Sinh" typeface="Iskoola Pota"/>
+        <a:font script="Mong" typeface="Mongolian Baiti"/>
+        <a:font script="Viet" typeface="Arial"/>
+        <a:font script="Uigh" typeface="Microsoft Uighur"/>
+        <a:font script="Geor" typeface="Sylfaen"/>
+      </a:minorFont>
+    </a:fontScheme>
+    <a:fmtScheme name="deep-p03-p04">
+      <a:fillStyleLst>
+        <a:solidFill>
+          <a:schemeClr val="phClr"/>
+        </a:solidFill>
+        <a:gradFill rotWithShape="1">
+          <a:gsLst>
+            <a:gs pos="0">
+              <a:schemeClr val="phClr">
+                <a:tint val="50000"/>
+                <a:satMod val="300000"/>
+              </a:schemeClr>
+            </a:gs>
+            <a:gs pos="35000">
+              <a:schemeClr val="phClr">
+                <a:tint val="37000"/>
+                <a:satMod val="300000"/>
+              </a:schemeClr>
+            </a:gs>
+            <a:gs pos="100000">
+              <a:schemeClr val="phClr">
+                <a:tint val="15000"/>
+                <a:satMod val="350000"/>
+              </a:schemeClr>
+            </a:gs>
+          </a:gsLst>
+          <a:lin ang="16200000" scaled="1"/>
+        </a:gradFill>
+        <a:gradFill rotWithShape="1">
+          <a:gsLst>
+            <a:gs pos="0">
+              <a:schemeClr val="phClr">
+                <a:tint val="100000"/>
+                <a:shade val="100000"/>
+                <a:satMod val="130000"/>
+              </a:schemeClr>
+            </a:gs>
+            <a:gs pos="100000">
+              <a:schemeClr val="phClr">
+                <a:tint val="50000"/>
+                <a:shade val="100000"/>
+                <a:satMod val="350000"/>
+              </a:schemeClr>
+            </a:gs>
+          </a:gsLst>
+          <a:lin ang="16200000" scaled="0"/>
+        </a:gradFill>
+      </a:fillStyleLst>
+      <a:lnStyleLst>
+        <a:ln w="9525" cap="flat" cmpd="sng" algn="ctr">
+          <a:solidFill>
+            <a:schemeClr val="phClr">
+              <a:shade val="95000"/>
+              <a:satMod val="105000"/>
+            </a:schemeClr>
+          </a:solidFill>
+          <a:prstDash val="solid"/>
+        </a:ln>
+        <a:ln w="25400" cap="flat" cmpd="sng" algn="ctr">
+          <a:solidFill>
+            <a:schemeClr val="phClr"/>
+          </a:solidFill>
+          <a:prstDash val="solid"/>
+        </a:ln>
+        <a:ln w="38100" cap="flat" cmpd="sng" algn="ctr">
+          <a:solidFill>
+            <a:schemeClr val="phClr"/>
+          </a:solidFill>
+          <a:prstDash val="solid"/>
+        </a:ln>
+      </a:lnStyleLst>
+      <a:effectStyleLst>
+        <a:effectStyle>
+          <a:effectLst>
+            <a:outerShdw blurRad="40000" dist="20000" dir="5400000" rotWithShape="0">
+              <a:srgbClr val="000000">
+                <a:alpha val="38000"/>
+              </a:srgbClr>
+            </a:outerShdw>
+          </a:effectLst>
+        </a:effectStyle>
+        <a:effectStyle>
+          <a:effectLst>
+            <a:outerShdw blurRad="40000" dist="23000" dir="5400000" rotWithShape="0">
+              <a:srgbClr val="000000">
+                <a:alpha val="35000"/>
+              </a:srgbClr>
+            </a:outerShdw>
+          </a:effectLst>
+        </a:effectStyle>
+        <a:effectStyle>
+          <a:effectLst>
+            <a:outerShdw blurRad="40000" dist="23000" dir="5400000" rotWithShape="0">
+              <a:srgbClr val="000000">
+                <a:alpha val="35000"/>
+              </a:srgbClr>
+            </a:outerShdw>
+          </a:effectLst>
+          <a:scene3d>
+            <a:camera prst="orthographicFront">
+              <a:rot lat="0" lon="0" rev="0"/>
+            </a:camera>
+            <a:lightRig rig="threePt" dir="t">
+              <a:rot lat="0" lon="0" rev="1200000"/>
+            </a:lightRig>
+          </a:scene3d>
+          <a:sp3d>
+            <a:bevelT w="63500" h="25400"/>
+          </a:sp3d>
+        </a:effectStyle>
+      </a:effectStyleLst>
+      <a:bgFillStyleLst>
+        <a:solidFill>
+          <a:schemeClr val="phClr"/>
+        </a:solidFill>
+        <a:gradFill rotWithShape="1">
+          <a:gsLst>
+            <a:gs pos="0">
+              <a:schemeClr val="phClr">
+                <a:tint val="40000"/>
+                <a:satMod val="350000"/>
+              </a:schemeClr>
+            </a:gs>
+            <a:gs pos="40000">
+              <a:schemeClr val="phClr">
+                <a:tint val="45000"/>
+                <a:shade val="99000"/>
+                <a:satMod val="350000"/>
+              </a:schemeClr>
+            </a:gs>
+            <a:gs pos="100000">
+              <a:schemeClr val="phClr">
+                <a:shade val="20000"/>
+                <a:satMod val="255000"/>
+              </a:schemeClr>
+            </a:gs>
+          </a:gsLst>
+          <a:path path="circle">
+            <a:fillToRect l="50000" t="-80000" r="50000" b="180000"/>
+          </a:path>
+        </a:gradFill>
+        <a:gradFill rotWithShape="1">
+          <a:gsLst>
+            <a:gs pos="0">
+              <a:schemeClr val="phClr">
+                <a:tint val="80000"/>
+                <a:satMod val="300000"/>
+              </a:schemeClr>
+            </a:gs>
+            <a:gs pos="100000">
+              <a:schemeClr val="phClr">
+                <a:shade val="30000"/>
+                <a:satMod val="200000"/>
+              </a:schemeClr>
+            </a:gs>
+          </a:gsLst>
+          <a:path path="circle">
+            <a:fillToRect l="50000" t="50000" r="50000" b="50000"/>
+          </a:path>
+        </a:gradFill>
+      </a:bgFillStyleLst>
+    </a:fmtScheme>
+  </a:themeElements>
+  <a:objectDefaults>
+    <a:spDef>
+      <a:spPr/>
+      <a:bodyPr/>
+      <a:lstStyle/>
+      <a:style>
+        <a:lnRef idx="1">
+          <a:schemeClr val="accent1"/>
+        </a:lnRef>
+        <a:fillRef idx="3">
+          <a:schemeClr val="accent1"/>
+        </a:fillRef>
+        <a:effectRef idx="2">
+          <a:schemeClr val="accent1"/>
+        </a:effectRef>
+        <a:fontRef idx="minor">
+          <a:schemeClr val="lt1"/>
+        </a:fontRef>
+      </a:style>
+    </a:spDef>
+    <a:lnDef>
+      <a:spPr/>
+      <a:bodyPr/>
+      <a:lstStyle/>
+      <a:style>
+        <a:lnRef idx="2">
+          <a:schemeClr val="accent1"/>
+        </a:lnRef>
+        <a:fillRef idx="0">
+          <a:schemeClr val="accent1"/>
+        </a:fillRef>
+        <a:effectRef idx="1">
+          <a:schemeClr val="accent1"/>
+        </a:effectRef>
+        <a:fontRef idx="minor">
+          <a:schemeClr val="tx1"/>
+        </a:fontRef>
+      </a:style>
+    </a:lnDef>
+  </a:objectDefaults>
+  <a:extraClrSchemeLst/>
+</a:theme>
 </file>
--- a/fixtures/golden/hello-merged.pptx
+++ b/fixtures/golden/hello-merged.pptx
@@ -2642,42 +2642,75 @@
       </p:sp>
       <p:sp>
         <p:nvSpPr>
-          <p:cNvPr id="10" name="Text 8"/>
-          <p:cNvSpPr/>
+          <p:cNvPr id="10" name="chrome-page-number"/>
+          <p:cNvSpPr txBox="1"/>
           <p:nvPr/>
         </p:nvSpPr>
         <p:spPr>
           <a:xfrm>
-            <a:off x="0" y="5494020"/>
-            <a:ext cx="11277600" cy="731520"/>
+            <a:off x="10360152" y="6172200"/>
+            <a:ext cx="1371600" cy="228600"/>
           </a:xfrm>
           <a:prstGeom prst="rect">
             <a:avLst/>
           </a:prstGeom>
           <a:noFill/>
-          <a:ln/>
         </p:spPr>
         <p:txBody>
-          <a:bodyPr wrap="none" lIns="0" tIns="0" rIns="0" bIns="0" rtlCol="0" anchor="t"/>
+          <a:bodyPr wrap="none" lIns="0" tIns="0" rIns="0" bIns="0" anchor="ctr">
+            <a:noAutofit/>
+          </a:bodyPr>
           <a:lstStyle/>
           <a:p>
-            <a:pPr algn="r" indent="0" marL="0">
-              <a:buNone/>
-            </a:pPr>
+            <a:pPr algn="r"/>
+            <a:fld id="{769bcc2d-d53b-523b-8db5-0da7700e7fc5}" type="slidenum">
+              <a:rPr lang="en-US" sz="900" dirty="0">
+                <a:solidFill>
+                  <a:srgbClr val="#5B6069"/>
+                </a:solidFill>
+                <a:latin typeface="Bower"/>
+                <a:ea typeface="Source Han Serif SC"/>
+                <a:cs typeface="Bower"/>
+              </a:rPr>
+              <a:t>‹#›</a:t>
+            </a:fld>
+          </a:p>
+        </p:txBody>
+      </p:sp>
+      <p:sp>
+        <p:nvSpPr>
+          <p:cNvPr id="11" name="chrome-footer"/>
+          <p:cNvSpPr txBox="1"/>
+          <p:nvPr/>
+        </p:nvSpPr>
+        <p:spPr>
+          <a:xfrm>
+            <a:off x="457200" y="6172200"/>
+            <a:ext cx="5486400" cy="228600"/>
+          </a:xfrm>
+          <a:prstGeom prst="rect">
+            <a:avLst/>
+          </a:prstGeom>
+          <a:noFill/>
+        </p:spPr>
+        <p:txBody>
+          <a:bodyPr wrap="none" lIns="0" tIns="0" rIns="0" bIns="0" anchor="ctr">
+            <a:noAutofit/>
+          </a:bodyPr>
+          <a:lstStyle/>
+          <a:p>
+            <a:pPr algn="l"/>
             <a:r>
-              <a:rPr lang="en-US" sz="4800" dirty="0">
+              <a:rPr lang="en-US" sz="900" dirty="0">
                 <a:solidFill>
-                  <a:srgbClr val="5B6069">
-                    <a:alpha val="30000"/>
-                  </a:srgbClr>
+                  <a:srgbClr val="#5B6069"/>
                 </a:solidFill>
-                <a:latin typeface="Georgia" pitchFamily="34" charset="0"/>
-                <a:ea typeface="Microsoft YaHei" pitchFamily="34" charset="-122"/>
-                <a:cs typeface="Georgia" pitchFamily="34" charset="-120"/>
+                <a:latin typeface="Bower"/>
+                <a:ea typeface="Source Han Serif SC"/>
+                <a:cs typeface="Bower"/>
               </a:rPr>
-              <a:t>02</a:t>
+              <a:t>dsh-ppt-fusion · golden fixture</a:t>
             </a:r>
-            <a:endParaRPr lang="en-US" sz="4800" dirty="0"/>
           </a:p>
         </p:txBody>
       </p:sp>
@@ -2845,6 +2878,117 @@
           </a:prstGeom>
         </p:spPr>
       </p:pic>
+      <p:sp>
+        <p:nvSpPr>
+          <p:cNvPr id="7" name="chrome-page-number"/>
+          <p:cNvSpPr txBox="1"/>
+          <p:nvPr/>
+        </p:nvSpPr>
+        <p:spPr>
+          <a:xfrm>
+            <a:off x="10360152" y="6172200"/>
+            <a:ext cx="1371600" cy="228600"/>
+          </a:xfrm>
+          <a:prstGeom prst="rect">
+            <a:avLst/>
+          </a:prstGeom>
+          <a:noFill/>
+        </p:spPr>
+        <p:txBody>
+          <a:bodyPr wrap="none" lIns="0" tIns="0" rIns="0" bIns="0" anchor="ctr">
+            <a:noAutofit/>
+          </a:bodyPr>
+          <a:lstStyle/>
+          <a:p>
+            <a:pPr algn="r"/>
+            <a:fld id="{0ec2eda5-17d4-5a57-a2d4-971ae3d79c0d}" type="slidenum">
+              <a:rPr lang="en-US" sz="900" dirty="0">
+                <a:solidFill>
+                  <a:srgbClr val="#5B6069"/>
+                </a:solidFill>
+                <a:latin typeface="Bower"/>
+                <a:ea typeface="Source Han Serif SC"/>
+                <a:cs typeface="Bower"/>
+              </a:rPr>
+              <a:t>‹#›</a:t>
+            </a:fld>
+          </a:p>
+        </p:txBody>
+      </p:sp>
+      <p:sp>
+        <p:nvSpPr>
+          <p:cNvPr id="8" name="chrome-footer"/>
+          <p:cNvSpPr txBox="1"/>
+          <p:nvPr/>
+        </p:nvSpPr>
+        <p:spPr>
+          <a:xfrm>
+            <a:off x="457200" y="6172200"/>
+            <a:ext cx="5486400" cy="228600"/>
+          </a:xfrm>
+          <a:prstGeom prst="rect">
+            <a:avLst/>
+          </a:prstGeom>
+          <a:noFill/>
+        </p:spPr>
+        <p:txBody>
+          <a:bodyPr wrap="none" lIns="0" tIns="0" rIns="0" bIns="0" anchor="ctr">
+            <a:noAutofit/>
+          </a:bodyPr>
+          <a:lstStyle/>
+          <a:p>
+            <a:pPr algn="l"/>
+            <a:r>
+              <a:rPr lang="en-US" sz="900" dirty="0">
+                <a:solidFill>
+                  <a:srgbClr val="#5B6069"/>
+                </a:solidFill>
+                <a:latin typeface="Bower"/>
+                <a:ea typeface="Source Han Serif SC"/>
+                <a:cs typeface="Bower"/>
+              </a:rPr>
+              <a:t>dsh-ppt-fusion · golden fixture</a:t>
+            </a:r>
+          </a:p>
+        </p:txBody>
+      </p:sp>
+      <p:sp>
+        <p:nvSpPr>
+          <p:cNvPr id="9" name="chrome-section"/>
+          <p:cNvSpPr txBox="1"/>
+          <p:nvPr/>
+        </p:nvSpPr>
+        <p:spPr>
+          <a:xfrm>
+            <a:off x="457200" y="274638"/>
+            <a:ext cx="4572000" cy="228600"/>
+          </a:xfrm>
+          <a:prstGeom prst="rect">
+            <a:avLst/>
+          </a:prstGeom>
+          <a:noFill/>
+        </p:spPr>
+        <p:txBody>
+          <a:bodyPr wrap="none" lIns="0" tIns="0" rIns="0" bIns="0" anchor="ctr">
+            <a:noAutofit/>
+          </a:bodyPr>
+          <a:lstStyle/>
+          <a:p>
+            <a:pPr algn="l"/>
+            <a:r>
+              <a:rPr lang="en-US" sz="900" dirty="0">
+                <a:solidFill>
+                  <a:srgbClr val="#5B6069"/>
+                </a:solidFill>
+                <a:latin typeface="Bower"/>
+                <a:ea typeface="Source Han Serif SC"/>
+                <a:cs typeface="Bower"/>
+              </a:rPr>
+              <a:t>深度引擎</a:t>
+            </a:r>
+          </a:p>
+        </p:txBody>
+      </p:sp>
     </p:spTree>
   </p:cSld>
   <p:clrMapOvr>
@@ -3619,6 +3763,80 @@
           </a:prstGeom>
         </p:spPr>
       </p:pic>
+      <p:sp>
+        <p:nvSpPr>
+          <p:cNvPr id="7" name="chrome-page-number"/>
+          <p:cNvSpPr txBox="1"/>
+          <p:nvPr/>
+        </p:nvSpPr>
+        <p:spPr>
+          <a:xfrm>
+            <a:off x="10360152" y="6172200"/>
+            <a:ext cx="1371600" cy="228600"/>
+          </a:xfrm>
+          <a:prstGeom prst="rect">
+            <a:avLst/>
+          </a:prstGeom>
+          <a:noFill/>
+        </p:spPr>
+        <p:txBody>
+          <a:bodyPr wrap="none" lIns="0" tIns="0" rIns="0" bIns="0" anchor="ctr">
+            <a:noAutofit/>
+          </a:bodyPr>
+          <a:lstStyle/>
+          <a:p>
+            <a:pPr algn="r"/>
+            <a:fld id="{77e496c3-b66a-57e9-bd1e-bc05c3adaf47}" type="slidenum">
+              <a:rPr lang="en-US" sz="900" dirty="0">
+                <a:solidFill>
+                  <a:srgbClr val="#5B6069"/>
+                </a:solidFill>
+                <a:latin typeface="Bower"/>
+                <a:ea typeface="Source Han Serif SC"/>
+                <a:cs typeface="Bower"/>
+              </a:rPr>
+              <a:t>‹#›</a:t>
+            </a:fld>
+          </a:p>
+        </p:txBody>
+      </p:sp>
+      <p:sp>
+        <p:nvSpPr>
+          <p:cNvPr id="8" name="chrome-footer"/>
+          <p:cNvSpPr txBox="1"/>
+          <p:nvPr/>
+        </p:nvSpPr>
+        <p:spPr>
+          <a:xfrm>
+            <a:off x="457200" y="6172200"/>
+            <a:ext cx="5486400" cy="228600"/>
+          </a:xfrm>
+          <a:prstGeom prst="rect">
+            <a:avLst/>
+          </a:prstGeom>
+          <a:noFill/>
+        </p:spPr>
+        <p:txBody>
+          <a:bodyPr wrap="none" lIns="0" tIns="0" rIns="0" bIns="0" anchor="ctr">
+            <a:noAutofit/>
+          </a:bodyPr>
+          <a:lstStyle/>
+          <a:p>
+            <a:pPr algn="l"/>
+            <a:r>
+              <a:rPr lang="en-US" sz="900" dirty="0">
+                <a:solidFill>
+                  <a:srgbClr val="#5B6069"/>
+                </a:solidFill>
+                <a:latin typeface="Bower"/>
+                <a:ea typeface="Source Han Serif SC"/>
+                <a:cs typeface="Bower"/>
+              </a:rPr>
+              <a:t>dsh-ppt-fusion · golden fixture</a:t>
+            </a:r>
+          </a:p>
+        </p:txBody>
+      </p:sp>
     </p:spTree>
   </p:cSld>
   <p:clrMapOvr>

--- a/fixtures/golden/hello-merged.pptx
+++ b/fixtures/golden/hello-merged.pptx
@@ -2994,7 +2994,7 @@
   <p:clrMapOvr>
     <a:masterClrMapping/>
   </p:clrMapOvr>
-  <p:transition xmlns:p14="http://schemas.microsoft.com/office/powerpoint/2010/main" p14:dur="400">
+  <p:transition xmlns:p14="http://schemas.microsoft.com/office/powerpoint/2010/main" p14:dur="400" advClick="0" advTm="16500">
     <p:fade/>
   </p:transition>
   <p:timing>
@@ -3842,7 +3842,7 @@
   <p:clrMapOvr>
     <a:masterClrMapping/>
   </p:clrMapOvr>
-  <p:transition xmlns:p14="http://schemas.microsoft.com/office/powerpoint/2010/main" p14:dur="500">
+  <p:transition xmlns:p14="http://schemas.microsoft.com/office/powerpoint/2010/main" p14:dur="500" advClick="0" advTm="14604">
     <p:wipe dir="r"/>
   </p:transition>
   <p:timing>

--- a/fixtures/golden/hello-merged.pptx
+++ b/fixtures/golden/hello-merged.pptx
@@ -2666,7 +2666,7 @@
             <a:fld id="{769bcc2d-d53b-523b-8db5-0da7700e7fc5}" type="slidenum">
               <a:rPr lang="en-US" sz="900" dirty="0">
                 <a:solidFill>
-                  <a:srgbClr val="#5B6069"/>
+                  <a:srgbClr val="5B6069"/>
                 </a:solidFill>
                 <a:latin typeface="Bower"/>
                 <a:ea typeface="Source Han Serif SC"/>
@@ -2703,7 +2703,7 @@
             <a:r>
               <a:rPr lang="en-US" sz="900" dirty="0">
                 <a:solidFill>
-                  <a:srgbClr val="#5B6069"/>
+                  <a:srgbClr val="5B6069"/>
                 </a:solidFill>
                 <a:latin typeface="Bower"/>
                 <a:ea typeface="Source Han Serif SC"/>
@@ -2904,7 +2904,7 @@
             <a:fld id="{0ec2eda5-17d4-5a57-a2d4-971ae3d79c0d}" type="slidenum">
               <a:rPr lang="en-US" sz="900" dirty="0">
                 <a:solidFill>
-                  <a:srgbClr val="#5B6069"/>
+                  <a:srgbClr val="5B6069"/>
                 </a:solidFill>
                 <a:latin typeface="Bower"/>
                 <a:ea typeface="Source Han Serif SC"/>
@@ -2941,7 +2941,7 @@
             <a:r>
               <a:rPr lang="en-US" sz="900" dirty="0">
                 <a:solidFill>
-                  <a:srgbClr val="#5B6069"/>
+                  <a:srgbClr val="5B6069"/>
                 </a:solidFill>
                 <a:latin typeface="Bower"/>
                 <a:ea typeface="Source Han Serif SC"/>
@@ -2978,7 +2978,7 @@
             <a:r>
               <a:rPr lang="en-US" sz="900" dirty="0">
                 <a:solidFill>
-                  <a:srgbClr val="#5B6069"/>
+                  <a:srgbClr val="5B6069"/>
                 </a:solidFill>
                 <a:latin typeface="Bower"/>
                 <a:ea typeface="Source Han Serif SC"/>
@@ -3789,7 +3789,7 @@
             <a:fld id="{77e496c3-b66a-57e9-bd1e-bc05c3adaf47}" type="slidenum">
               <a:rPr lang="en-US" sz="900" dirty="0">
                 <a:solidFill>
-                  <a:srgbClr val="#5B6069"/>
+                  <a:srgbClr val="5B6069"/>
                 </a:solidFill>
                 <a:latin typeface="Bower"/>
                 <a:ea typeface="Source Han Serif SC"/>
@@ -3826,7 +3826,7 @@
             <a:r>
               <a:rPr lang="en-US" sz="900" dirty="0">
                 <a:solidFill>
-                  <a:srgbClr val="#5B6069"/>
+                  <a:srgbClr val="5B6069"/>
                 </a:solidFill>
                 <a:latin typeface="Bower"/>
                 <a:ea typeface="Source Han Serif SC"/>

--- a/fixtures/golden/hello-merged.pptx
+++ b/fixtures/golden/hello-merged.pptx
@@ -2322,6 +2322,43 @@
               <a:t>golden fixture: five pages, two engines, one deck</a:t>
             </a:r>
             <a:endParaRPr lang="en-US" sz="1650" dirty="0"/>
+          </a:p>
+        </p:txBody>
+      </p:sp>
+      <p:sp>
+        <p:nvSpPr>
+          <p:cNvPr id="10" name="chrome-footer"/>
+          <p:cNvSpPr txBox="1"/>
+          <p:nvPr/>
+        </p:nvSpPr>
+        <p:spPr>
+          <a:xfrm>
+            <a:off x="457200" y="6172200"/>
+            <a:ext cx="5486400" cy="228600"/>
+          </a:xfrm>
+          <a:prstGeom prst="rect">
+            <a:avLst/>
+          </a:prstGeom>
+          <a:noFill/>
+        </p:spPr>
+        <p:txBody>
+          <a:bodyPr wrap="none" lIns="0" tIns="0" rIns="0" bIns="0" anchor="ctr">
+            <a:noAutofit/>
+          </a:bodyPr>
+          <a:lstStyle/>
+          <a:p>
+            <a:pPr algn="l"/>
+            <a:r>
+              <a:rPr lang="en-US" sz="900" dirty="0">
+                <a:solidFill>
+                  <a:srgbClr val="5B6069"/>
+                </a:solidFill>
+                <a:latin typeface="Bower"/>
+                <a:ea typeface="Source Han Serif SC"/>
+                <a:cs typeface="Bower"/>
+              </a:rPr>
+              <a:t>dsh-ppt-fusion · golden fixture</a:t>
+            </a:r>
           </a:p>
         </p:txBody>
       </p:sp>
@@ -4285,6 +4322,43 @@
               <a:t>dsh-ppt render</a:t>
             </a:r>
             <a:endParaRPr lang="en-US" sz="1200" dirty="0"/>
+          </a:p>
+        </p:txBody>
+      </p:sp>
+      <p:sp>
+        <p:nvSpPr>
+          <p:cNvPr id="12" name="chrome-footer"/>
+          <p:cNvSpPr txBox="1"/>
+          <p:nvPr/>
+        </p:nvSpPr>
+        <p:spPr>
+          <a:xfrm>
+            <a:off x="457200" y="6172200"/>
+            <a:ext cx="5486400" cy="228600"/>
+          </a:xfrm>
+          <a:prstGeom prst="rect">
+            <a:avLst/>
+          </a:prstGeom>
+          <a:noFill/>
+        </p:spPr>
+        <p:txBody>
+          <a:bodyPr wrap="none" lIns="0" tIns="0" rIns="0" bIns="0" anchor="ctr">
+            <a:noAutofit/>
+          </a:bodyPr>
+          <a:lstStyle/>
+          <a:p>
+            <a:pPr algn="l"/>
+            <a:r>
+              <a:rPr lang="en-US" sz="900" dirty="0">
+                <a:solidFill>
+                  <a:srgbClr val="5B6069"/>
+                </a:solidFill>
+                <a:latin typeface="Bower"/>
+                <a:ea typeface="Source Han Serif SC"/>
+                <a:cs typeface="Bower"/>
+              </a:rPr>
+              <a:t>dsh-ppt-fusion · golden fixture</a:t>
+            </a:r>
           </a:p>
         </p:txBody>
       </p:sp>
